--- a/docs/opeSchedule_proposal.pptx
+++ b/docs/opeSchedule_proposal.pptx
@@ -15533,7 +15533,7 @@
                   <a:srgbClr val="1C2B3A"/>
                 </a:solidFill>
               </a:rPr>
-              <a:t>  ●  複数プロジェクト管理、アーカイブ機能</a:t>
+              <a:t>  ●  モデル名 による最上位分類（プロジェクト群を整理）</a:t>
             </a:r>
           </a:p>
           <a:p>
@@ -15548,7 +15548,22 @@
                   <a:srgbClr val="1C2B3A"/>
                 </a:solidFill>
               </a:rPr>
-              <a:t>  ●  レスポンシブ Web UI（PC ブラウザで動作）</a:t>
+              <a:t>  ●  サムネイル画像 をヘッダーに表示（視認性向上）</a:t>
+            </a:r>
+          </a:p>
+          <a:p>
+            <a:pPr>
+              <a:spcBef>
+                <a:spcPts val="400"/>
+              </a:spcBef>
+            </a:pPr>
+            <a:r>
+              <a:rPr sz="1200">
+                <a:solidFill>
+                  <a:srgbClr val="1C2B3A"/>
+                </a:solidFill>
+              </a:rPr>
+              <a:t>  ●  複数プロジェクト比較表示（セパレーター行で視認性向上）</a:t>
             </a:r>
           </a:p>
           <a:p>
